--- a/decks/day3/module-9-lab-kickoff.pptx
+++ b/decks/day3/module-9-lab-kickoff.pptx
@@ -509,7 +509,7 @@
           <a:p>
             <a:r>
               <a:rPr lang="en-US" dirty="0"/>
-              <a:t>• This module frames a proposed future lab. No Day 3 lab files are created in this change.
+              <a:t>• This module previews labs/day3/'s five parts before hands-on time. The lab is complete and ready to run.
 • GROUNDING SOURCE: https://learn.microsoft.com/en-us/agent-framework/concepts/agents/conversations/session?tabs=python
 • GROUNDING SOURCE: https://learn.microsoft.com/en-us/agent-framework/agents/structured-outputs?tabs=python
 • GROUNDING SOURCE: https://learn.microsoft.com/en-us/agent-framework/agents/evaluation?tabs=python</a:t>
@@ -600,7 +600,7 @@
           <a:p>
             <a:r>
               <a:rPr lang="en-US" dirty="0"/>
-              <a:t>• This sequence composes the day's primitives. It is a proposed lab flow only; the repository intentionally has no labs/day3 implementation yet.
+              <a:t>• This sequence composes the day's primitives and matches labs/day3/'s five parts exactly — each part is its own standalone agent, not one assistant extended across parts.
 • GROUNDING SOURCE: https://learn.microsoft.com/en-us/agent-framework/concepts/agents/conversations/session?tabs=python
 • GROUNDING SOURCE: https://learn.microsoft.com/en-us/agent-framework/agents/structured-outputs?tabs=python
 • GROUNDING SOURCE: https://learn.microsoft.com/en-us/agent-framework/agents/evaluation?tabs=python</a:t>
@@ -872,7 +872,7 @@
           <a:p>
             <a:r>
               <a:rPr lang="en-US" dirty="0"/>
-              <a:t>• Include positive read, positive write, and no-tool cases. Ground truth must include the consolidated tool plus action. Repeat enough to observe variation, then report the observed rate without inventing a universal threshold.
+              <a:t>• Include positive read, positive write, and no-tool cases. Ground truth must include the consolidated tool plus action. Repeat enough to observe variation, then report the observed rate without inventing a universal threshold. The built lab implements 3 of the 4 cases below — rejected write is deferred; see labs/day3/python/part_e_evaluate.py's module docstring for why.
 • GROUNDING SOURCE: https://learn.microsoft.com/en-us/agent-framework/agents/evaluation?tabs=python</a:t>
             </a:r>
             <a:endParaRPr lang="en-US" dirty="0"/>
@@ -961,7 +961,7 @@
           <a:p>
             <a:r>
               <a:rPr lang="en-US" dirty="0"/>
-              <a:t>• Do not claim setup has already happened. A future lab author must supply a dedicated Entra-backed Azure DevOps Services organization/project, Foundry project and judge deployment, least-privilege identity, and known work-item fixtures.
+              <a:t>• These are learner-provided, per labs/day3/README.md's Prerequisites and Azure DevOps setup sections — a dedicated Entra-backed Azure DevOps Services organization/project, Foundry project and judge deployment, least-privilege identity, and known work-item fixtures.
 • GROUNDING SOURCE: https://learn.microsoft.com/en-us/azure/devops/mcp-server/remote-mcp-server?view=azure-devops
 • GROUNDING SOURCE: https://learn.microsoft.com/en-us/agent-framework/agents/evaluation?tabs=python</a:t>
             </a:r>
@@ -1141,7 +1141,7 @@
           <a:p>
             <a:r>
               <a:rPr lang="en-US" dirty="0"/>
-              <a:t>• Close the core Day 3 live time here. Learners have all required primitives for the proposed future lab.
+              <a:t>• Close the core Day 3 live time here. Learners have all required primitives before starting labs/day3/'s Parts A-E.
 • GROUNDING SOURCE: https://learn.microsoft.com/en-us/agent-framework/agents/evaluation?tabs=python
 • GROUNDING SOURCE: https://learn.microsoft.com/en-us/azure/devops/mcp-server/remote-mcp-server?view=azure-devops</a:t>
             </a:r>
@@ -1627,7 +1627,7 @@
                 <a:ea typeface="Calibri" pitchFamily="34" charset="-122"/>
                 <a:cs typeface="Calibri" pitchFamily="34" charset="-120"/>
               </a:rPr>
-              <a:t>Frame a proposed lab that composes Day 3's primitives</a:t>
+              <a:t>Preview the lab you're about to build</a:t>
             </a:r>
             <a:endParaRPr lang="en-US" sz="1800" dirty="0"/>
           </a:p>
@@ -1864,7 +1864,7 @@
                 <a:ea typeface="Calibri" pitchFamily="34" charset="-122"/>
                 <a:cs typeface="Calibri" pitchFamily="34" charset="-120"/>
               </a:rPr>
-              <a:t>Future lab architecture</a:t>
+              <a:t>Lab architecture</a:t>
             </a:r>
             <a:endParaRPr lang="en-US" sz="2800" dirty="0"/>
           </a:p>
@@ -5104,7 +5104,7 @@
                 <a:ea typeface="Calibri" pitchFamily="34" charset="-122"/>
                 <a:cs typeface="Calibri" pitchFamily="34" charset="-120"/>
               </a:rPr>
-              <a:t>Prerequisites for the future lab</a:t>
+              <a:t>Lab prerequisites</a:t>
             </a:r>
             <a:endParaRPr lang="en-US" sz="2800" dirty="0"/>
           </a:p>
@@ -7562,7 +7562,7 @@
                 <a:ea typeface="Calibri" pitchFamily="34" charset="-122"/>
                 <a:cs typeface="Calibri" pitchFamily="34" charset="-120"/>
               </a:rPr>
-              <a:t>You treat the lab sequence as a proposed structure, not a completed lab.</a:t>
+              <a:t>You'll see this five-part structure again in labs/day3/, then work through it yourself.</a:t>
             </a:r>
             <a:endParaRPr lang="en-US" sz="1300" dirty="0"/>
           </a:p>
@@ -7812,7 +7812,7 @@
                 <a:ea typeface="Calibri" pitchFamily="34" charset="-122"/>
                 <a:cs typeface="Calibri" pitchFamily="34" charset="-120"/>
               </a:rPr>
-              <a:t>You confirm prerequisites — a dedicated Azure DevOps project, a Foundry evaluation project, and known work-item fixtures — before this proposed lab can be scaffolded.</a:t>
+              <a:t>You confirm prerequisites — a dedicated Azure DevOps project, a Foundry evaluation project, and known work-item fixtures — before you start the lab.</a:t>
             </a:r>
             <a:endParaRPr lang="en-US" sz="1300" dirty="0"/>
           </a:p>

--- a/decks/day3/module-9-lab-kickoff.pptx
+++ b/decks/day3/module-9-lab-kickoff.pptx
@@ -5876,9 +5876,9 @@
             <a:tbl>
               <a:tblPr/>
               <a:tblGrid>
-                <a:gridCol w="2804160"/>
-                <a:gridCol w="2804160"/>
-                <a:gridCol w="2804160"/>
+                <a:gridCol w="1589024"/>
+                <a:gridCol w="3551936"/>
+                <a:gridCol w="3271520"/>
               </a:tblGrid>
               <a:tr h="586740">
                 <a:tc>

--- a/decks/day3/module-9-lab-kickoff.pptx
+++ b/decks/day3/module-9-lab-kickoff.pptx
@@ -1965,16 +1965,16 @@
         <p:spPr>
           <a:xfrm>
             <a:off x="896112" y="1335024"/>
-            <a:ext cx="1975104" cy="310896"/>
-          </a:xfrm>
-          <a:prstGeom prst="rect">
-            <a:avLst/>
-          </a:prstGeom>
-          <a:noFill/>
-          <a:ln/>
-        </p:spPr>
-        <p:txBody>
-          <a:bodyPr wrap="square" lIns="0" tIns="0" rIns="0" bIns="0" rtlCol="0" anchor="ctr">
+            <a:ext cx="1975104" cy="549402"/>
+          </a:xfrm>
+          <a:prstGeom prst="rect">
+            <a:avLst/>
+          </a:prstGeom>
+          <a:noFill/>
+          <a:ln/>
+        </p:spPr>
+        <p:txBody>
+          <a:bodyPr wrap="square" lIns="0" tIns="0" rIns="0" bIns="0" rtlCol="0" anchor="t">
             <a:normAutofit/>
           </a:bodyPr>
           <a:lstStyle/>
@@ -2005,8 +2005,8 @@
         </p:nvSpPr>
         <p:spPr>
           <a:xfrm>
-            <a:off x="512064" y="1719072"/>
-            <a:ext cx="2340864" cy="950976"/>
+            <a:off x="512064" y="1939290"/>
+            <a:ext cx="2340864" cy="758190"/>
           </a:xfrm>
           <a:prstGeom prst="rect">
             <a:avLst/>
@@ -2153,16 +2153,16 @@
         <p:spPr>
           <a:xfrm>
             <a:off x="3785616" y="1335024"/>
-            <a:ext cx="1975104" cy="310896"/>
-          </a:xfrm>
-          <a:prstGeom prst="rect">
-            <a:avLst/>
-          </a:prstGeom>
-          <a:noFill/>
-          <a:ln/>
-        </p:spPr>
-        <p:txBody>
-          <a:bodyPr wrap="square" lIns="0" tIns="0" rIns="0" bIns="0" rtlCol="0" anchor="ctr">
+            <a:ext cx="1975104" cy="311277"/>
+          </a:xfrm>
+          <a:prstGeom prst="rect">
+            <a:avLst/>
+          </a:prstGeom>
+          <a:noFill/>
+          <a:ln/>
+        </p:spPr>
+        <p:txBody>
+          <a:bodyPr wrap="square" lIns="0" tIns="0" rIns="0" bIns="0" rtlCol="0" anchor="t">
             <a:normAutofit/>
           </a:bodyPr>
           <a:lstStyle/>
@@ -2193,8 +2193,8 @@
         </p:nvSpPr>
         <p:spPr>
           <a:xfrm>
-            <a:off x="3401568" y="1719072"/>
-            <a:ext cx="2340864" cy="950976"/>
+            <a:off x="3401568" y="1701165"/>
+            <a:ext cx="2340864" cy="996315"/>
           </a:xfrm>
           <a:prstGeom prst="rect">
             <a:avLst/>
@@ -2341,16 +2341,16 @@
         <p:spPr>
           <a:xfrm>
             <a:off x="6675120" y="1335024"/>
-            <a:ext cx="1975104" cy="310896"/>
-          </a:xfrm>
-          <a:prstGeom prst="rect">
-            <a:avLst/>
-          </a:prstGeom>
-          <a:noFill/>
-          <a:ln/>
-        </p:spPr>
-        <p:txBody>
-          <a:bodyPr wrap="square" lIns="0" tIns="0" rIns="0" bIns="0" rtlCol="0" anchor="ctr">
+            <a:ext cx="1975104" cy="311277"/>
+          </a:xfrm>
+          <a:prstGeom prst="rect">
+            <a:avLst/>
+          </a:prstGeom>
+          <a:noFill/>
+          <a:ln/>
+        </p:spPr>
+        <p:txBody>
+          <a:bodyPr wrap="square" lIns="0" tIns="0" rIns="0" bIns="0" rtlCol="0" anchor="t">
             <a:normAutofit/>
           </a:bodyPr>
           <a:lstStyle/>
@@ -2381,8 +2381,8 @@
         </p:nvSpPr>
         <p:spPr>
           <a:xfrm>
-            <a:off x="6291072" y="1719072"/>
-            <a:ext cx="2340864" cy="950976"/>
+            <a:off x="6291072" y="1701165"/>
+            <a:ext cx="2340864" cy="996315"/>
           </a:xfrm>
           <a:prstGeom prst="rect">
             <a:avLst/>
@@ -2509,16 +2509,16 @@
         <p:spPr>
           <a:xfrm>
             <a:off x="896112" y="3163824"/>
-            <a:ext cx="1975104" cy="310896"/>
-          </a:xfrm>
-          <a:prstGeom prst="rect">
-            <a:avLst/>
-          </a:prstGeom>
-          <a:noFill/>
-          <a:ln/>
-        </p:spPr>
-        <p:txBody>
-          <a:bodyPr wrap="square" lIns="0" tIns="0" rIns="0" bIns="0" rtlCol="0" anchor="ctr">
+            <a:ext cx="1975104" cy="311277"/>
+          </a:xfrm>
+          <a:prstGeom prst="rect">
+            <a:avLst/>
+          </a:prstGeom>
+          <a:noFill/>
+          <a:ln/>
+        </p:spPr>
+        <p:txBody>
+          <a:bodyPr wrap="square" lIns="0" tIns="0" rIns="0" bIns="0" rtlCol="0" anchor="t">
             <a:normAutofit/>
           </a:bodyPr>
           <a:lstStyle/>
@@ -2549,8 +2549,8 @@
         </p:nvSpPr>
         <p:spPr>
           <a:xfrm>
-            <a:off x="512064" y="3547872"/>
-            <a:ext cx="2340864" cy="950976"/>
+            <a:off x="512064" y="3529965"/>
+            <a:ext cx="2340864" cy="996315"/>
           </a:xfrm>
           <a:prstGeom prst="rect">
             <a:avLst/>
@@ -2697,16 +2697,16 @@
         <p:spPr>
           <a:xfrm>
             <a:off x="3785616" y="3163824"/>
-            <a:ext cx="1975104" cy="310896"/>
-          </a:xfrm>
-          <a:prstGeom prst="rect">
-            <a:avLst/>
-          </a:prstGeom>
-          <a:noFill/>
-          <a:ln/>
-        </p:spPr>
-        <p:txBody>
-          <a:bodyPr wrap="square" lIns="0" tIns="0" rIns="0" bIns="0" rtlCol="0" anchor="ctr">
+            <a:ext cx="1975104" cy="311277"/>
+          </a:xfrm>
+          <a:prstGeom prst="rect">
+            <a:avLst/>
+          </a:prstGeom>
+          <a:noFill/>
+          <a:ln/>
+        </p:spPr>
+        <p:txBody>
+          <a:bodyPr wrap="square" lIns="0" tIns="0" rIns="0" bIns="0" rtlCol="0" anchor="t">
             <a:normAutofit/>
           </a:bodyPr>
           <a:lstStyle/>
@@ -2737,8 +2737,8 @@
         </p:nvSpPr>
         <p:spPr>
           <a:xfrm>
-            <a:off x="3401568" y="3547872"/>
-            <a:ext cx="2340864" cy="950976"/>
+            <a:off x="3401568" y="3529965"/>
+            <a:ext cx="2340864" cy="996315"/>
           </a:xfrm>
           <a:prstGeom prst="rect">
             <a:avLst/>
@@ -4107,16 +4107,16 @@
         <p:spPr>
           <a:xfrm>
             <a:off x="896112" y="1335024"/>
-            <a:ext cx="1975104" cy="310896"/>
-          </a:xfrm>
-          <a:prstGeom prst="rect">
-            <a:avLst/>
-          </a:prstGeom>
-          <a:noFill/>
-          <a:ln/>
-        </p:spPr>
-        <p:txBody>
-          <a:bodyPr wrap="square" lIns="0" tIns="0" rIns="0" bIns="0" rtlCol="0" anchor="ctr">
+            <a:ext cx="1975104" cy="311277"/>
+          </a:xfrm>
+          <a:prstGeom prst="rect">
+            <a:avLst/>
+          </a:prstGeom>
+          <a:noFill/>
+          <a:ln/>
+        </p:spPr>
+        <p:txBody>
+          <a:bodyPr wrap="square" lIns="0" tIns="0" rIns="0" bIns="0" rtlCol="0" anchor="t">
             <a:normAutofit/>
           </a:bodyPr>
           <a:lstStyle/>
@@ -4147,8 +4147,8 @@
         </p:nvSpPr>
         <p:spPr>
           <a:xfrm>
-            <a:off x="512064" y="1719072"/>
-            <a:ext cx="2340864" cy="950976"/>
+            <a:off x="512064" y="1701165"/>
+            <a:ext cx="2340864" cy="996315"/>
           </a:xfrm>
           <a:prstGeom prst="rect">
             <a:avLst/>
@@ -4295,16 +4295,16 @@
         <p:spPr>
           <a:xfrm>
             <a:off x="3785616" y="1335024"/>
-            <a:ext cx="1975104" cy="310896"/>
-          </a:xfrm>
-          <a:prstGeom prst="rect">
-            <a:avLst/>
-          </a:prstGeom>
-          <a:noFill/>
-          <a:ln/>
-        </p:spPr>
-        <p:txBody>
-          <a:bodyPr wrap="square" lIns="0" tIns="0" rIns="0" bIns="0" rtlCol="0" anchor="ctr">
+            <a:ext cx="1975104" cy="311277"/>
+          </a:xfrm>
+          <a:prstGeom prst="rect">
+            <a:avLst/>
+          </a:prstGeom>
+          <a:noFill/>
+          <a:ln/>
+        </p:spPr>
+        <p:txBody>
+          <a:bodyPr wrap="square" lIns="0" tIns="0" rIns="0" bIns="0" rtlCol="0" anchor="t">
             <a:normAutofit/>
           </a:bodyPr>
           <a:lstStyle/>
@@ -4335,8 +4335,8 @@
         </p:nvSpPr>
         <p:spPr>
           <a:xfrm>
-            <a:off x="3401568" y="1719072"/>
-            <a:ext cx="2340864" cy="950976"/>
+            <a:off x="3401568" y="1701165"/>
+            <a:ext cx="2340864" cy="996315"/>
           </a:xfrm>
           <a:prstGeom prst="rect">
             <a:avLst/>
@@ -4483,16 +4483,16 @@
         <p:spPr>
           <a:xfrm>
             <a:off x="6675120" y="1335024"/>
-            <a:ext cx="1975104" cy="310896"/>
-          </a:xfrm>
-          <a:prstGeom prst="rect">
-            <a:avLst/>
-          </a:prstGeom>
-          <a:noFill/>
-          <a:ln/>
-        </p:spPr>
-        <p:txBody>
-          <a:bodyPr wrap="square" lIns="0" tIns="0" rIns="0" bIns="0" rtlCol="0" anchor="ctr">
+            <a:ext cx="1975104" cy="311277"/>
+          </a:xfrm>
+          <a:prstGeom prst="rect">
+            <a:avLst/>
+          </a:prstGeom>
+          <a:noFill/>
+          <a:ln/>
+        </p:spPr>
+        <p:txBody>
+          <a:bodyPr wrap="square" lIns="0" tIns="0" rIns="0" bIns="0" rtlCol="0" anchor="t">
             <a:normAutofit/>
           </a:bodyPr>
           <a:lstStyle/>
@@ -4523,8 +4523,8 @@
         </p:nvSpPr>
         <p:spPr>
           <a:xfrm>
-            <a:off x="6291072" y="1719072"/>
-            <a:ext cx="2340864" cy="950976"/>
+            <a:off x="6291072" y="1701165"/>
+            <a:ext cx="2340864" cy="996315"/>
           </a:xfrm>
           <a:prstGeom prst="rect">
             <a:avLst/>
@@ -4651,16 +4651,16 @@
         <p:spPr>
           <a:xfrm>
             <a:off x="896112" y="3163824"/>
-            <a:ext cx="1975104" cy="310896"/>
-          </a:xfrm>
-          <a:prstGeom prst="rect">
-            <a:avLst/>
-          </a:prstGeom>
-          <a:noFill/>
-          <a:ln/>
-        </p:spPr>
-        <p:txBody>
-          <a:bodyPr wrap="square" lIns="0" tIns="0" rIns="0" bIns="0" rtlCol="0" anchor="ctr">
+            <a:ext cx="1975104" cy="311277"/>
+          </a:xfrm>
+          <a:prstGeom prst="rect">
+            <a:avLst/>
+          </a:prstGeom>
+          <a:noFill/>
+          <a:ln/>
+        </p:spPr>
+        <p:txBody>
+          <a:bodyPr wrap="square" lIns="0" tIns="0" rIns="0" bIns="0" rtlCol="0" anchor="t">
             <a:normAutofit/>
           </a:bodyPr>
           <a:lstStyle/>
@@ -4691,8 +4691,8 @@
         </p:nvSpPr>
         <p:spPr>
           <a:xfrm>
-            <a:off x="512064" y="3547872"/>
-            <a:ext cx="2340864" cy="950976"/>
+            <a:off x="512064" y="3529965"/>
+            <a:ext cx="2340864" cy="996315"/>
           </a:xfrm>
           <a:prstGeom prst="rect">
             <a:avLst/>
@@ -4839,16 +4839,16 @@
         <p:spPr>
           <a:xfrm>
             <a:off x="3785616" y="3163824"/>
-            <a:ext cx="1975104" cy="310896"/>
-          </a:xfrm>
-          <a:prstGeom prst="rect">
-            <a:avLst/>
-          </a:prstGeom>
-          <a:noFill/>
-          <a:ln/>
-        </p:spPr>
-        <p:txBody>
-          <a:bodyPr wrap="square" lIns="0" tIns="0" rIns="0" bIns="0" rtlCol="0" anchor="ctr">
+            <a:ext cx="1975104" cy="311277"/>
+          </a:xfrm>
+          <a:prstGeom prst="rect">
+            <a:avLst/>
+          </a:prstGeom>
+          <a:noFill/>
+          <a:ln/>
+        </p:spPr>
+        <p:txBody>
+          <a:bodyPr wrap="square" lIns="0" tIns="0" rIns="0" bIns="0" rtlCol="0" anchor="t">
             <a:normAutofit/>
           </a:bodyPr>
           <a:lstStyle/>
@@ -4879,8 +4879,8 @@
         </p:nvSpPr>
         <p:spPr>
           <a:xfrm>
-            <a:off x="3401568" y="3547872"/>
-            <a:ext cx="2340864" cy="950976"/>
+            <a:off x="3401568" y="3529965"/>
+            <a:ext cx="2340864" cy="996315"/>
           </a:xfrm>
           <a:prstGeom prst="rect">
             <a:avLst/>
@@ -5146,16 +5146,16 @@
         <p:spPr>
           <a:xfrm>
             <a:off x="512064" y="1197864"/>
-            <a:ext cx="2377440" cy="310896"/>
-          </a:xfrm>
-          <a:prstGeom prst="rect">
-            <a:avLst/>
-          </a:prstGeom>
-          <a:noFill/>
-          <a:ln/>
-        </p:spPr>
-        <p:txBody>
-          <a:bodyPr wrap="square" lIns="0" tIns="0" rIns="0" bIns="0" rtlCol="0" anchor="ctr">
+            <a:ext cx="2377440" cy="311277"/>
+          </a:xfrm>
+          <a:prstGeom prst="rect">
+            <a:avLst/>
+          </a:prstGeom>
+          <a:noFill/>
+          <a:ln/>
+        </p:spPr>
+        <p:txBody>
+          <a:bodyPr wrap="square" lIns="0" tIns="0" rIns="0" bIns="0" rtlCol="0" anchor="t">
             <a:normAutofit/>
           </a:bodyPr>
           <a:lstStyle/>
@@ -5186,8 +5186,8 @@
         </p:nvSpPr>
         <p:spPr>
           <a:xfrm>
-            <a:off x="512064" y="1581912"/>
-            <a:ext cx="2377440" cy="1033272"/>
+            <a:off x="512064" y="1564005"/>
+            <a:ext cx="2377440" cy="1078611"/>
           </a:xfrm>
           <a:prstGeom prst="rect">
             <a:avLst/>
@@ -5255,16 +5255,16 @@
         <p:spPr>
           <a:xfrm>
             <a:off x="3383280" y="1197864"/>
-            <a:ext cx="2377440" cy="310896"/>
-          </a:xfrm>
-          <a:prstGeom prst="rect">
-            <a:avLst/>
-          </a:prstGeom>
-          <a:noFill/>
-          <a:ln/>
-        </p:spPr>
-        <p:txBody>
-          <a:bodyPr wrap="square" lIns="0" tIns="0" rIns="0" bIns="0" rtlCol="0" anchor="ctr">
+            <a:ext cx="2377440" cy="311277"/>
+          </a:xfrm>
+          <a:prstGeom prst="rect">
+            <a:avLst/>
+          </a:prstGeom>
+          <a:noFill/>
+          <a:ln/>
+        </p:spPr>
+        <p:txBody>
+          <a:bodyPr wrap="square" lIns="0" tIns="0" rIns="0" bIns="0" rtlCol="0" anchor="t">
             <a:normAutofit/>
           </a:bodyPr>
           <a:lstStyle/>
@@ -5295,8 +5295,8 @@
         </p:nvSpPr>
         <p:spPr>
           <a:xfrm>
-            <a:off x="3383280" y="1581912"/>
-            <a:ext cx="2377440" cy="1033272"/>
+            <a:off x="3383280" y="1564005"/>
+            <a:ext cx="2377440" cy="1078611"/>
           </a:xfrm>
           <a:prstGeom prst="rect">
             <a:avLst/>
@@ -5364,16 +5364,16 @@
         <p:spPr>
           <a:xfrm>
             <a:off x="6254496" y="1197864"/>
-            <a:ext cx="2377440" cy="310896"/>
-          </a:xfrm>
-          <a:prstGeom prst="rect">
-            <a:avLst/>
-          </a:prstGeom>
-          <a:noFill/>
-          <a:ln/>
-        </p:spPr>
-        <p:txBody>
-          <a:bodyPr wrap="square" lIns="0" tIns="0" rIns="0" bIns="0" rtlCol="0" anchor="ctr">
+            <a:ext cx="2377440" cy="311277"/>
+          </a:xfrm>
+          <a:prstGeom prst="rect">
+            <a:avLst/>
+          </a:prstGeom>
+          <a:noFill/>
+          <a:ln/>
+        </p:spPr>
+        <p:txBody>
+          <a:bodyPr wrap="square" lIns="0" tIns="0" rIns="0" bIns="0" rtlCol="0" anchor="t">
             <a:normAutofit/>
           </a:bodyPr>
           <a:lstStyle/>
@@ -5404,8 +5404,8 @@
         </p:nvSpPr>
         <p:spPr>
           <a:xfrm>
-            <a:off x="6254496" y="1581912"/>
-            <a:ext cx="2377440" cy="1033272"/>
+            <a:off x="6254496" y="1564005"/>
+            <a:ext cx="2377440" cy="1078611"/>
           </a:xfrm>
           <a:prstGeom prst="rect">
             <a:avLst/>
@@ -5473,16 +5473,16 @@
         <p:spPr>
           <a:xfrm>
             <a:off x="512064" y="3054096"/>
-            <a:ext cx="2377440" cy="310896"/>
-          </a:xfrm>
-          <a:prstGeom prst="rect">
-            <a:avLst/>
-          </a:prstGeom>
-          <a:noFill/>
-          <a:ln/>
-        </p:spPr>
-        <p:txBody>
-          <a:bodyPr wrap="square" lIns="0" tIns="0" rIns="0" bIns="0" rtlCol="0" anchor="ctr">
+            <a:ext cx="2377440" cy="311277"/>
+          </a:xfrm>
+          <a:prstGeom prst="rect">
+            <a:avLst/>
+          </a:prstGeom>
+          <a:noFill/>
+          <a:ln/>
+        </p:spPr>
+        <p:txBody>
+          <a:bodyPr wrap="square" lIns="0" tIns="0" rIns="0" bIns="0" rtlCol="0" anchor="t">
             <a:normAutofit/>
           </a:bodyPr>
           <a:lstStyle/>
@@ -5513,8 +5513,8 @@
         </p:nvSpPr>
         <p:spPr>
           <a:xfrm>
-            <a:off x="512064" y="3438144"/>
-            <a:ext cx="2377440" cy="1033272"/>
+            <a:off x="512064" y="3420237"/>
+            <a:ext cx="2377440" cy="1078611"/>
           </a:xfrm>
           <a:prstGeom prst="rect">
             <a:avLst/>
@@ -5582,16 +5582,16 @@
         <p:spPr>
           <a:xfrm>
             <a:off x="3383280" y="3054096"/>
-            <a:ext cx="2377440" cy="310896"/>
-          </a:xfrm>
-          <a:prstGeom prst="rect">
-            <a:avLst/>
-          </a:prstGeom>
-          <a:noFill/>
-          <a:ln/>
-        </p:spPr>
-        <p:txBody>
-          <a:bodyPr wrap="square" lIns="0" tIns="0" rIns="0" bIns="0" rtlCol="0" anchor="ctr">
+            <a:ext cx="2377440" cy="311277"/>
+          </a:xfrm>
+          <a:prstGeom prst="rect">
+            <a:avLst/>
+          </a:prstGeom>
+          <a:noFill/>
+          <a:ln/>
+        </p:spPr>
+        <p:txBody>
+          <a:bodyPr wrap="square" lIns="0" tIns="0" rIns="0" bIns="0" rtlCol="0" anchor="t">
             <a:normAutofit/>
           </a:bodyPr>
           <a:lstStyle/>
@@ -5622,8 +5622,8 @@
         </p:nvSpPr>
         <p:spPr>
           <a:xfrm>
-            <a:off x="3383280" y="3438144"/>
-            <a:ext cx="2377440" cy="1033272"/>
+            <a:off x="3383280" y="3420237"/>
+            <a:ext cx="2377440" cy="1078611"/>
           </a:xfrm>
           <a:prstGeom prst="rect">
             <a:avLst/>
